--- a/reports/pptx/삼성전자.pptx
+++ b/reports/pptx/삼성전자.pptx
@@ -3460,7 +3460,7 @@
                 <a:ea typeface="맑은 고딕"/>
                 <a:cs typeface="맑은 고딕"/>
               </a:rPr>
-              <a:t>• 삼성전자는 KOSPI 상장 대표 대형주(종목코드 005930, DART 고유번호 00126380)이며, 메모리 반도체·파운드리·스마트폰(MX)·디스플레이를 영위하는 글로벌 종합 전자기업입니다. (출처: 한국거래소·DART / 기준일 2026-06-16)</a:t>
+              <a:t>• 삼성전자(005930) — 한국거래소(KRX) 상장 종목입니다. (출처: FinanceDataReader / 기준일 2026-06-16)</a:t>
             </a:r>
           </a:p>
           <a:p>
@@ -3478,43 +3478,7 @@
                 <a:ea typeface="맑은 고딕"/>
                 <a:cs typeface="맑은 고딕"/>
               </a:rPr>
-              <a:t>• 시가총액은 보통주 기준 약 2,047.6조원으로 산출됩니다(종가 343,000원 × 발행주식수 약 5,969,782,550주). 가격 기준·발행주식수 산정 방식에 따라 절대 수준 해석에 유의가 필요합니다. (출처: pykrx OHLCV 종가·공시 통상 발행주식수 / 기준일 2026-06-16, 계산값)</a:t>
-            </a:r>
-          </a:p>
-          <a:p>
-            <a:pPr>
-              <a:spcAft>
-                <a:spcPts val="800"/>
-              </a:spcAft>
-            </a:pPr>
-            <a:r>
-              <a:rPr sz="1600" b="0">
-                <a:solidFill>
-                  <a:srgbClr val="404040"/>
-                </a:solidFill>
-                <a:latin typeface="맑은 고딕"/>
-                <a:ea typeface="맑은 고딕"/>
-                <a:cs typeface="맑은 고딕"/>
-              </a:rPr>
-              <a:t>• 일평균 거래대금이 수조 원대에 달하는 초대형주로, 체결·유동성 측면의 거래 리스크는 낮은 편입니다. (출처: pykrx OHLCV 기반 추정 / 기준일 2026-06-16)</a:t>
-            </a:r>
-          </a:p>
-          <a:p>
-            <a:pPr>
-              <a:spcAft>
-                <a:spcPts val="800"/>
-              </a:spcAft>
-            </a:pPr>
-            <a:r>
-              <a:rPr sz="1600" b="0">
-                <a:solidFill>
-                  <a:srgbClr val="404040"/>
-                </a:solidFill>
-                <a:latin typeface="맑은 고딕"/>
-                <a:ea typeface="맑은 고딕"/>
-                <a:cs typeface="맑은 고딕"/>
-              </a:rPr>
-              <a:t>• 본 리포트는 가치투자 관점의 학습용 분석이며, 다음 정기 실적발표 예정일은 2026-07-23입니다. (출처: Investing.com / 기준일 2026-06-16)</a:t>
+              <a:t>• 최근 종가는 343,000원입니다. (출처: FinanceDataReader / 기준일 2026-06-16)</a:t>
             </a:r>
           </a:p>
         </p:txBody>
@@ -3695,1238 +3659,16 @@
           </a:p>
         </p:txBody>
       </p:sp>
-      <p:graphicFrame>
-        <p:nvGraphicFramePr>
-          <p:cNvPr id="5" name="Table 4"/>
-          <p:cNvGraphicFramePr>
-            <a:graphicFrameLocks noGrp="1"/>
-          </p:cNvGraphicFramePr>
-          <p:nvPr/>
-        </p:nvGraphicFramePr>
-        <p:xfrm>
-          <a:off x="548640" y="1371600"/>
-          <a:ext cx="11094415" cy="2880360"/>
-        </p:xfrm>
-        <a:graphic>
-          <a:graphicData uri="http://schemas.openxmlformats.org/drawingml/2006/table">
-            <a:tbl>
-              <a:tblPr firstRow="1">
-                <a:tableStyleId>{5C22544A-7EE6-4342-B048-85BDC9FD1C3A}</a:tableStyleId>
-              </a:tblPr>
-              <a:tblGrid>
-                <a:gridCol w="2773603"/>
-                <a:gridCol w="2773603"/>
-                <a:gridCol w="2773603"/>
-                <a:gridCol w="2773606"/>
-              </a:tblGrid>
-              <a:tr h="411480">
-                <a:tc>
-                  <a:txBody>
-                    <a:bodyPr wrap="square"/>
-                    <a:lstStyle/>
-                    <a:p>
-                      <a:pPr algn="ctr"/>
-                      <a:r>
-                        <a:rPr sz="1200" b="1">
-                          <a:solidFill>
-                            <a:srgbClr val="FFFFFF"/>
-                          </a:solidFill>
-                          <a:latin typeface="맑은 고딕"/>
-                          <a:ea typeface="맑은 고딕"/>
-                          <a:cs typeface="맑은 고딕"/>
-                        </a:rPr>
-                        <a:t>항목</a:t>
-                      </a:r>
-                    </a:p>
-                  </a:txBody>
-                  <a:tcPr marL="91440" marR="91440" marT="36576" marB="36576" anchor="ctr">
-                    <a:solidFill>
-                      <a:srgbClr val="1F2A44"/>
-                    </a:solidFill>
-                  </a:tcPr>
-                </a:tc>
-                <a:tc>
-                  <a:txBody>
-                    <a:bodyPr wrap="square"/>
-                    <a:lstStyle/>
-                    <a:p>
-                      <a:pPr algn="ctr"/>
-                      <a:r>
-                        <a:rPr sz="1200" b="1">
-                          <a:solidFill>
-                            <a:srgbClr val="FFFFFF"/>
-                          </a:solidFill>
-                          <a:latin typeface="맑은 고딕"/>
-                          <a:ea typeface="맑은 고딕"/>
-                          <a:cs typeface="맑은 고딕"/>
-                        </a:rPr>
-                        <a:t>2023</a:t>
-                      </a:r>
-                    </a:p>
-                  </a:txBody>
-                  <a:tcPr marL="91440" marR="91440" marT="36576" marB="36576" anchor="ctr">
-                    <a:solidFill>
-                      <a:srgbClr val="1F2A44"/>
-                    </a:solidFill>
-                  </a:tcPr>
-                </a:tc>
-                <a:tc>
-                  <a:txBody>
-                    <a:bodyPr wrap="square"/>
-                    <a:lstStyle/>
-                    <a:p>
-                      <a:pPr algn="ctr"/>
-                      <a:r>
-                        <a:rPr sz="1200" b="1">
-                          <a:solidFill>
-                            <a:srgbClr val="FFFFFF"/>
-                          </a:solidFill>
-                          <a:latin typeface="맑은 고딕"/>
-                          <a:ea typeface="맑은 고딕"/>
-                          <a:cs typeface="맑은 고딕"/>
-                        </a:rPr>
-                        <a:t>2024</a:t>
-                      </a:r>
-                    </a:p>
-                  </a:txBody>
-                  <a:tcPr marL="91440" marR="91440" marT="36576" marB="36576" anchor="ctr">
-                    <a:solidFill>
-                      <a:srgbClr val="1F2A44"/>
-                    </a:solidFill>
-                  </a:tcPr>
-                </a:tc>
-                <a:tc>
-                  <a:txBody>
-                    <a:bodyPr wrap="square"/>
-                    <a:lstStyle/>
-                    <a:p>
-                      <a:pPr algn="ctr"/>
-                      <a:r>
-                        <a:rPr sz="1200" b="1">
-                          <a:solidFill>
-                            <a:srgbClr val="FFFFFF"/>
-                          </a:solidFill>
-                          <a:latin typeface="맑은 고딕"/>
-                          <a:ea typeface="맑은 고딕"/>
-                          <a:cs typeface="맑은 고딕"/>
-                        </a:rPr>
-                        <a:t>2025</a:t>
-                      </a:r>
-                    </a:p>
-                  </a:txBody>
-                  <a:tcPr marL="91440" marR="91440" marT="36576" marB="36576" anchor="ctr">
-                    <a:solidFill>
-                      <a:srgbClr val="1F2A44"/>
-                    </a:solidFill>
-                  </a:tcPr>
-                </a:tc>
-              </a:tr>
-              <a:tr h="411480">
-                <a:tc>
-                  <a:txBody>
-                    <a:bodyPr wrap="square"/>
-                    <a:lstStyle/>
-                    <a:p>
-                      <a:pPr algn="l"/>
-                      <a:r>
-                        <a:rPr sz="1200" b="0">
-                          <a:solidFill>
-                            <a:srgbClr val="404040"/>
-                          </a:solidFill>
-                          <a:latin typeface="맑은 고딕"/>
-                          <a:ea typeface="맑은 고딕"/>
-                          <a:cs typeface="맑은 고딕"/>
-                        </a:rPr>
-                        <a:t>매출액(조원)</a:t>
-                      </a:r>
-                    </a:p>
-                  </a:txBody>
-                  <a:tcPr marL="91440" marR="91440" marT="36576" marB="36576" anchor="ctr">
-                    <a:solidFill>
-                      <a:srgbClr val="FFFFFF"/>
-                    </a:solidFill>
-                    <a:lnT w="6350" cap="flat" cmpd="sng" algn="ctr">
-                      <a:solidFill>
-                        <a:srgbClr val="D9D9D9"/>
-                      </a:solidFill>
-                    </a:lnT>
-                    <a:lnB w="6350" cap="flat" cmpd="sng" algn="ctr">
-                      <a:solidFill>
-                        <a:srgbClr val="D9D9D9"/>
-                      </a:solidFill>
-                    </a:lnB>
-                    <a:lnL w="6350" cap="flat" cmpd="sng" algn="ctr">
-                      <a:solidFill>
-                        <a:srgbClr val="D9D9D9"/>
-                      </a:solidFill>
-                    </a:lnL>
-                    <a:lnR w="6350" cap="flat" cmpd="sng" algn="ctr">
-                      <a:solidFill>
-                        <a:srgbClr val="D9D9D9"/>
-                      </a:solidFill>
-                    </a:lnR>
-                  </a:tcPr>
-                </a:tc>
-                <a:tc>
-                  <a:txBody>
-                    <a:bodyPr wrap="square"/>
-                    <a:lstStyle/>
-                    <a:p>
-                      <a:pPr algn="ctr"/>
-                      <a:r>
-                        <a:rPr sz="1200" b="0">
-                          <a:solidFill>
-                            <a:srgbClr val="404040"/>
-                          </a:solidFill>
-                          <a:latin typeface="맑은 고딕"/>
-                          <a:ea typeface="맑은 고딕"/>
-                          <a:cs typeface="맑은 고딕"/>
-                        </a:rPr>
-                        <a:t>258.9</a:t>
-                      </a:r>
-                    </a:p>
-                  </a:txBody>
-                  <a:tcPr marL="91440" marR="91440" marT="36576" marB="36576" anchor="ctr">
-                    <a:solidFill>
-                      <a:srgbClr val="FFFFFF"/>
-                    </a:solidFill>
-                    <a:lnT w="6350" cap="flat" cmpd="sng" algn="ctr">
-                      <a:solidFill>
-                        <a:srgbClr val="D9D9D9"/>
-                      </a:solidFill>
-                    </a:lnT>
-                    <a:lnB w="6350" cap="flat" cmpd="sng" algn="ctr">
-                      <a:solidFill>
-                        <a:srgbClr val="D9D9D9"/>
-                      </a:solidFill>
-                    </a:lnB>
-                    <a:lnL w="6350" cap="flat" cmpd="sng" algn="ctr">
-                      <a:solidFill>
-                        <a:srgbClr val="D9D9D9"/>
-                      </a:solidFill>
-                    </a:lnL>
-                    <a:lnR w="6350" cap="flat" cmpd="sng" algn="ctr">
-                      <a:solidFill>
-                        <a:srgbClr val="D9D9D9"/>
-                      </a:solidFill>
-                    </a:lnR>
-                  </a:tcPr>
-                </a:tc>
-                <a:tc>
-                  <a:txBody>
-                    <a:bodyPr wrap="square"/>
-                    <a:lstStyle/>
-                    <a:p>
-                      <a:pPr algn="ctr"/>
-                      <a:r>
-                        <a:rPr sz="1200" b="0">
-                          <a:solidFill>
-                            <a:srgbClr val="404040"/>
-                          </a:solidFill>
-                          <a:latin typeface="맑은 고딕"/>
-                          <a:ea typeface="맑은 고딕"/>
-                          <a:cs typeface="맑은 고딕"/>
-                        </a:rPr>
-                        <a:t>300.9</a:t>
-                      </a:r>
-                    </a:p>
-                  </a:txBody>
-                  <a:tcPr marL="91440" marR="91440" marT="36576" marB="36576" anchor="ctr">
-                    <a:solidFill>
-                      <a:srgbClr val="FFFFFF"/>
-                    </a:solidFill>
-                    <a:lnT w="6350" cap="flat" cmpd="sng" algn="ctr">
-                      <a:solidFill>
-                        <a:srgbClr val="D9D9D9"/>
-                      </a:solidFill>
-                    </a:lnT>
-                    <a:lnB w="6350" cap="flat" cmpd="sng" algn="ctr">
-                      <a:solidFill>
-                        <a:srgbClr val="D9D9D9"/>
-                      </a:solidFill>
-                    </a:lnB>
-                    <a:lnL w="6350" cap="flat" cmpd="sng" algn="ctr">
-                      <a:solidFill>
-                        <a:srgbClr val="D9D9D9"/>
-                      </a:solidFill>
-                    </a:lnL>
-                    <a:lnR w="6350" cap="flat" cmpd="sng" algn="ctr">
-                      <a:solidFill>
-                        <a:srgbClr val="D9D9D9"/>
-                      </a:solidFill>
-                    </a:lnR>
-                  </a:tcPr>
-                </a:tc>
-                <a:tc>
-                  <a:txBody>
-                    <a:bodyPr wrap="square"/>
-                    <a:lstStyle/>
-                    <a:p>
-                      <a:pPr algn="ctr"/>
-                      <a:r>
-                        <a:rPr sz="1200" b="0">
-                          <a:solidFill>
-                            <a:srgbClr val="404040"/>
-                          </a:solidFill>
-                          <a:latin typeface="맑은 고딕"/>
-                          <a:ea typeface="맑은 고딕"/>
-                          <a:cs typeface="맑은 고딕"/>
-                        </a:rPr>
-                        <a:t>333.6</a:t>
-                      </a:r>
-                    </a:p>
-                  </a:txBody>
-                  <a:tcPr marL="91440" marR="91440" marT="36576" marB="36576" anchor="ctr">
-                    <a:solidFill>
-                      <a:srgbClr val="FFFFFF"/>
-                    </a:solidFill>
-                    <a:lnT w="6350" cap="flat" cmpd="sng" algn="ctr">
-                      <a:solidFill>
-                        <a:srgbClr val="D9D9D9"/>
-                      </a:solidFill>
-                    </a:lnT>
-                    <a:lnB w="6350" cap="flat" cmpd="sng" algn="ctr">
-                      <a:solidFill>
-                        <a:srgbClr val="D9D9D9"/>
-                      </a:solidFill>
-                    </a:lnB>
-                    <a:lnL w="6350" cap="flat" cmpd="sng" algn="ctr">
-                      <a:solidFill>
-                        <a:srgbClr val="D9D9D9"/>
-                      </a:solidFill>
-                    </a:lnL>
-                    <a:lnR w="6350" cap="flat" cmpd="sng" algn="ctr">
-                      <a:solidFill>
-                        <a:srgbClr val="D9D9D9"/>
-                      </a:solidFill>
-                    </a:lnR>
-                  </a:tcPr>
-                </a:tc>
-              </a:tr>
-              <a:tr h="411480">
-                <a:tc>
-                  <a:txBody>
-                    <a:bodyPr wrap="square"/>
-                    <a:lstStyle/>
-                    <a:p>
-                      <a:pPr algn="l"/>
-                      <a:r>
-                        <a:rPr sz="1200" b="0">
-                          <a:solidFill>
-                            <a:srgbClr val="404040"/>
-                          </a:solidFill>
-                          <a:latin typeface="맑은 고딕"/>
-                          <a:ea typeface="맑은 고딕"/>
-                          <a:cs typeface="맑은 고딕"/>
-                        </a:rPr>
-                        <a:t>영업이익(조원)</a:t>
-                      </a:r>
-                    </a:p>
-                  </a:txBody>
-                  <a:tcPr marL="91440" marR="91440" marT="36576" marB="36576" anchor="ctr">
-                    <a:solidFill>
-                      <a:srgbClr val="FFFFFF"/>
-                    </a:solidFill>
-                    <a:lnT w="6350" cap="flat" cmpd="sng" algn="ctr">
-                      <a:solidFill>
-                        <a:srgbClr val="D9D9D9"/>
-                      </a:solidFill>
-                    </a:lnT>
-                    <a:lnB w="6350" cap="flat" cmpd="sng" algn="ctr">
-                      <a:solidFill>
-                        <a:srgbClr val="D9D9D9"/>
-                      </a:solidFill>
-                    </a:lnB>
-                    <a:lnL w="6350" cap="flat" cmpd="sng" algn="ctr">
-                      <a:solidFill>
-                        <a:srgbClr val="D9D9D9"/>
-                      </a:solidFill>
-                    </a:lnL>
-                    <a:lnR w="6350" cap="flat" cmpd="sng" algn="ctr">
-                      <a:solidFill>
-                        <a:srgbClr val="D9D9D9"/>
-                      </a:solidFill>
-                    </a:lnR>
-                  </a:tcPr>
-                </a:tc>
-                <a:tc>
-                  <a:txBody>
-                    <a:bodyPr wrap="square"/>
-                    <a:lstStyle/>
-                    <a:p>
-                      <a:pPr algn="ctr"/>
-                      <a:r>
-                        <a:rPr sz="1200" b="0">
-                          <a:solidFill>
-                            <a:srgbClr val="404040"/>
-                          </a:solidFill>
-                          <a:latin typeface="맑은 고딕"/>
-                          <a:ea typeface="맑은 고딕"/>
-                          <a:cs typeface="맑은 고딕"/>
-                        </a:rPr>
-                        <a:t>6.6</a:t>
-                      </a:r>
-                    </a:p>
-                  </a:txBody>
-                  <a:tcPr marL="91440" marR="91440" marT="36576" marB="36576" anchor="ctr">
-                    <a:solidFill>
-                      <a:srgbClr val="FFFFFF"/>
-                    </a:solidFill>
-                    <a:lnT w="6350" cap="flat" cmpd="sng" algn="ctr">
-                      <a:solidFill>
-                        <a:srgbClr val="D9D9D9"/>
-                      </a:solidFill>
-                    </a:lnT>
-                    <a:lnB w="6350" cap="flat" cmpd="sng" algn="ctr">
-                      <a:solidFill>
-                        <a:srgbClr val="D9D9D9"/>
-                      </a:solidFill>
-                    </a:lnB>
-                    <a:lnL w="6350" cap="flat" cmpd="sng" algn="ctr">
-                      <a:solidFill>
-                        <a:srgbClr val="D9D9D9"/>
-                      </a:solidFill>
-                    </a:lnL>
-                    <a:lnR w="6350" cap="flat" cmpd="sng" algn="ctr">
-                      <a:solidFill>
-                        <a:srgbClr val="D9D9D9"/>
-                      </a:solidFill>
-                    </a:lnR>
-                  </a:tcPr>
-                </a:tc>
-                <a:tc>
-                  <a:txBody>
-                    <a:bodyPr wrap="square"/>
-                    <a:lstStyle/>
-                    <a:p>
-                      <a:pPr algn="ctr"/>
-                      <a:r>
-                        <a:rPr sz="1200" b="0">
-                          <a:solidFill>
-                            <a:srgbClr val="404040"/>
-                          </a:solidFill>
-                          <a:latin typeface="맑은 고딕"/>
-                          <a:ea typeface="맑은 고딕"/>
-                          <a:cs typeface="맑은 고딕"/>
-                        </a:rPr>
-                        <a:t>32.7</a:t>
-                      </a:r>
-                    </a:p>
-                  </a:txBody>
-                  <a:tcPr marL="91440" marR="91440" marT="36576" marB="36576" anchor="ctr">
-                    <a:solidFill>
-                      <a:srgbClr val="FFFFFF"/>
-                    </a:solidFill>
-                    <a:lnT w="6350" cap="flat" cmpd="sng" algn="ctr">
-                      <a:solidFill>
-                        <a:srgbClr val="D9D9D9"/>
-                      </a:solidFill>
-                    </a:lnT>
-                    <a:lnB w="6350" cap="flat" cmpd="sng" algn="ctr">
-                      <a:solidFill>
-                        <a:srgbClr val="D9D9D9"/>
-                      </a:solidFill>
-                    </a:lnB>
-                    <a:lnL w="6350" cap="flat" cmpd="sng" algn="ctr">
-                      <a:solidFill>
-                        <a:srgbClr val="D9D9D9"/>
-                      </a:solidFill>
-                    </a:lnL>
-                    <a:lnR w="6350" cap="flat" cmpd="sng" algn="ctr">
-                      <a:solidFill>
-                        <a:srgbClr val="D9D9D9"/>
-                      </a:solidFill>
-                    </a:lnR>
-                  </a:tcPr>
-                </a:tc>
-                <a:tc>
-                  <a:txBody>
-                    <a:bodyPr wrap="square"/>
-                    <a:lstStyle/>
-                    <a:p>
-                      <a:pPr algn="ctr"/>
-                      <a:r>
-                        <a:rPr sz="1200" b="0">
-                          <a:solidFill>
-                            <a:srgbClr val="404040"/>
-                          </a:solidFill>
-                          <a:latin typeface="맑은 고딕"/>
-                          <a:ea typeface="맑은 고딕"/>
-                          <a:cs typeface="맑은 고딕"/>
-                        </a:rPr>
-                        <a:t>43.6</a:t>
-                      </a:r>
-                    </a:p>
-                  </a:txBody>
-                  <a:tcPr marL="91440" marR="91440" marT="36576" marB="36576" anchor="ctr">
-                    <a:solidFill>
-                      <a:srgbClr val="FFFFFF"/>
-                    </a:solidFill>
-                    <a:lnT w="6350" cap="flat" cmpd="sng" algn="ctr">
-                      <a:solidFill>
-                        <a:srgbClr val="D9D9D9"/>
-                      </a:solidFill>
-                    </a:lnT>
-                    <a:lnB w="6350" cap="flat" cmpd="sng" algn="ctr">
-                      <a:solidFill>
-                        <a:srgbClr val="D9D9D9"/>
-                      </a:solidFill>
-                    </a:lnB>
-                    <a:lnL w="6350" cap="flat" cmpd="sng" algn="ctr">
-                      <a:solidFill>
-                        <a:srgbClr val="D9D9D9"/>
-                      </a:solidFill>
-                    </a:lnL>
-                    <a:lnR w="6350" cap="flat" cmpd="sng" algn="ctr">
-                      <a:solidFill>
-                        <a:srgbClr val="D9D9D9"/>
-                      </a:solidFill>
-                    </a:lnR>
-                  </a:tcPr>
-                </a:tc>
-              </a:tr>
-              <a:tr h="411480">
-                <a:tc>
-                  <a:txBody>
-                    <a:bodyPr wrap="square"/>
-                    <a:lstStyle/>
-                    <a:p>
-                      <a:pPr algn="l"/>
-                      <a:r>
-                        <a:rPr sz="1200" b="0">
-                          <a:solidFill>
-                            <a:srgbClr val="404040"/>
-                          </a:solidFill>
-                          <a:latin typeface="맑은 고딕"/>
-                          <a:ea typeface="맑은 고딕"/>
-                          <a:cs typeface="맑은 고딕"/>
-                        </a:rPr>
-                        <a:t>당기순이익(조원)</a:t>
-                      </a:r>
-                    </a:p>
-                  </a:txBody>
-                  <a:tcPr marL="91440" marR="91440" marT="36576" marB="36576" anchor="ctr">
-                    <a:solidFill>
-                      <a:srgbClr val="FFFFFF"/>
-                    </a:solidFill>
-                    <a:lnT w="6350" cap="flat" cmpd="sng" algn="ctr">
-                      <a:solidFill>
-                        <a:srgbClr val="D9D9D9"/>
-                      </a:solidFill>
-                    </a:lnT>
-                    <a:lnB w="6350" cap="flat" cmpd="sng" algn="ctr">
-                      <a:solidFill>
-                        <a:srgbClr val="D9D9D9"/>
-                      </a:solidFill>
-                    </a:lnB>
-                    <a:lnL w="6350" cap="flat" cmpd="sng" algn="ctr">
-                      <a:solidFill>
-                        <a:srgbClr val="D9D9D9"/>
-                      </a:solidFill>
-                    </a:lnL>
-                    <a:lnR w="6350" cap="flat" cmpd="sng" algn="ctr">
-                      <a:solidFill>
-                        <a:srgbClr val="D9D9D9"/>
-                      </a:solidFill>
-                    </a:lnR>
-                  </a:tcPr>
-                </a:tc>
-                <a:tc>
-                  <a:txBody>
-                    <a:bodyPr wrap="square"/>
-                    <a:lstStyle/>
-                    <a:p>
-                      <a:pPr algn="ctr"/>
-                      <a:r>
-                        <a:rPr sz="1200" b="0">
-                          <a:solidFill>
-                            <a:srgbClr val="404040"/>
-                          </a:solidFill>
-                          <a:latin typeface="맑은 고딕"/>
-                          <a:ea typeface="맑은 고딕"/>
-                          <a:cs typeface="맑은 고딕"/>
-                        </a:rPr>
-                        <a:t>15.5</a:t>
-                      </a:r>
-                    </a:p>
-                  </a:txBody>
-                  <a:tcPr marL="91440" marR="91440" marT="36576" marB="36576" anchor="ctr">
-                    <a:solidFill>
-                      <a:srgbClr val="FFFFFF"/>
-                    </a:solidFill>
-                    <a:lnT w="6350" cap="flat" cmpd="sng" algn="ctr">
-                      <a:solidFill>
-                        <a:srgbClr val="D9D9D9"/>
-                      </a:solidFill>
-                    </a:lnT>
-                    <a:lnB w="6350" cap="flat" cmpd="sng" algn="ctr">
-                      <a:solidFill>
-                        <a:srgbClr val="D9D9D9"/>
-                      </a:solidFill>
-                    </a:lnB>
-                    <a:lnL w="6350" cap="flat" cmpd="sng" algn="ctr">
-                      <a:solidFill>
-                        <a:srgbClr val="D9D9D9"/>
-                      </a:solidFill>
-                    </a:lnL>
-                    <a:lnR w="6350" cap="flat" cmpd="sng" algn="ctr">
-                      <a:solidFill>
-                        <a:srgbClr val="D9D9D9"/>
-                      </a:solidFill>
-                    </a:lnR>
-                  </a:tcPr>
-                </a:tc>
-                <a:tc>
-                  <a:txBody>
-                    <a:bodyPr wrap="square"/>
-                    <a:lstStyle/>
-                    <a:p>
-                      <a:pPr algn="ctr"/>
-                      <a:r>
-                        <a:rPr sz="1200" b="0">
-                          <a:solidFill>
-                            <a:srgbClr val="404040"/>
-                          </a:solidFill>
-                          <a:latin typeface="맑은 고딕"/>
-                          <a:ea typeface="맑은 고딕"/>
-                          <a:cs typeface="맑은 고딕"/>
-                        </a:rPr>
-                        <a:t>34.5</a:t>
-                      </a:r>
-                    </a:p>
-                  </a:txBody>
-                  <a:tcPr marL="91440" marR="91440" marT="36576" marB="36576" anchor="ctr">
-                    <a:solidFill>
-                      <a:srgbClr val="FFFFFF"/>
-                    </a:solidFill>
-                    <a:lnT w="6350" cap="flat" cmpd="sng" algn="ctr">
-                      <a:solidFill>
-                        <a:srgbClr val="D9D9D9"/>
-                      </a:solidFill>
-                    </a:lnT>
-                    <a:lnB w="6350" cap="flat" cmpd="sng" algn="ctr">
-                      <a:solidFill>
-                        <a:srgbClr val="D9D9D9"/>
-                      </a:solidFill>
-                    </a:lnB>
-                    <a:lnL w="6350" cap="flat" cmpd="sng" algn="ctr">
-                      <a:solidFill>
-                        <a:srgbClr val="D9D9D9"/>
-                      </a:solidFill>
-                    </a:lnL>
-                    <a:lnR w="6350" cap="flat" cmpd="sng" algn="ctr">
-                      <a:solidFill>
-                        <a:srgbClr val="D9D9D9"/>
-                      </a:solidFill>
-                    </a:lnR>
-                  </a:tcPr>
-                </a:tc>
-                <a:tc>
-                  <a:txBody>
-                    <a:bodyPr wrap="square"/>
-                    <a:lstStyle/>
-                    <a:p>
-                      <a:pPr algn="ctr"/>
-                      <a:r>
-                        <a:rPr sz="1200" b="0">
-                          <a:solidFill>
-                            <a:srgbClr val="404040"/>
-                          </a:solidFill>
-                          <a:latin typeface="맑은 고딕"/>
-                          <a:ea typeface="맑은 고딕"/>
-                          <a:cs typeface="맑은 고딕"/>
-                        </a:rPr>
-                        <a:t>45.2</a:t>
-                      </a:r>
-                    </a:p>
-                  </a:txBody>
-                  <a:tcPr marL="91440" marR="91440" marT="36576" marB="36576" anchor="ctr">
-                    <a:solidFill>
-                      <a:srgbClr val="FFFFFF"/>
-                    </a:solidFill>
-                    <a:lnT w="6350" cap="flat" cmpd="sng" algn="ctr">
-                      <a:solidFill>
-                        <a:srgbClr val="D9D9D9"/>
-                      </a:solidFill>
-                    </a:lnT>
-                    <a:lnB w="6350" cap="flat" cmpd="sng" algn="ctr">
-                      <a:solidFill>
-                        <a:srgbClr val="D9D9D9"/>
-                      </a:solidFill>
-                    </a:lnB>
-                    <a:lnL w="6350" cap="flat" cmpd="sng" algn="ctr">
-                      <a:solidFill>
-                        <a:srgbClr val="D9D9D9"/>
-                      </a:solidFill>
-                    </a:lnL>
-                    <a:lnR w="6350" cap="flat" cmpd="sng" algn="ctr">
-                      <a:solidFill>
-                        <a:srgbClr val="D9D9D9"/>
-                      </a:solidFill>
-                    </a:lnR>
-                  </a:tcPr>
-                </a:tc>
-              </a:tr>
-              <a:tr h="411480">
-                <a:tc>
-                  <a:txBody>
-                    <a:bodyPr wrap="square"/>
-                    <a:lstStyle/>
-                    <a:p>
-                      <a:pPr algn="l"/>
-                      <a:r>
-                        <a:rPr sz="1200" b="0">
-                          <a:solidFill>
-                            <a:srgbClr val="404040"/>
-                          </a:solidFill>
-                          <a:latin typeface="맑은 고딕"/>
-                          <a:ea typeface="맑은 고딕"/>
-                          <a:cs typeface="맑은 고딕"/>
-                        </a:rPr>
-                        <a:t>영업이익률</a:t>
-                      </a:r>
-                    </a:p>
-                  </a:txBody>
-                  <a:tcPr marL="91440" marR="91440" marT="36576" marB="36576" anchor="ctr">
-                    <a:solidFill>
-                      <a:srgbClr val="FFFFFF"/>
-                    </a:solidFill>
-                    <a:lnT w="6350" cap="flat" cmpd="sng" algn="ctr">
-                      <a:solidFill>
-                        <a:srgbClr val="D9D9D9"/>
-                      </a:solidFill>
-                    </a:lnT>
-                    <a:lnB w="6350" cap="flat" cmpd="sng" algn="ctr">
-                      <a:solidFill>
-                        <a:srgbClr val="D9D9D9"/>
-                      </a:solidFill>
-                    </a:lnB>
-                    <a:lnL w="6350" cap="flat" cmpd="sng" algn="ctr">
-                      <a:solidFill>
-                        <a:srgbClr val="D9D9D9"/>
-                      </a:solidFill>
-                    </a:lnL>
-                    <a:lnR w="6350" cap="flat" cmpd="sng" algn="ctr">
-                      <a:solidFill>
-                        <a:srgbClr val="D9D9D9"/>
-                      </a:solidFill>
-                    </a:lnR>
-                  </a:tcPr>
-                </a:tc>
-                <a:tc>
-                  <a:txBody>
-                    <a:bodyPr wrap="square"/>
-                    <a:lstStyle/>
-                    <a:p>
-                      <a:pPr algn="ctr"/>
-                      <a:r>
-                        <a:rPr sz="1200" b="0">
-                          <a:solidFill>
-                            <a:srgbClr val="404040"/>
-                          </a:solidFill>
-                          <a:latin typeface="맑은 고딕"/>
-                          <a:ea typeface="맑은 고딕"/>
-                          <a:cs typeface="맑은 고딕"/>
-                        </a:rPr>
-                        <a:t>2.5%</a:t>
-                      </a:r>
-                    </a:p>
-                  </a:txBody>
-                  <a:tcPr marL="91440" marR="91440" marT="36576" marB="36576" anchor="ctr">
-                    <a:solidFill>
-                      <a:srgbClr val="FFFFFF"/>
-                    </a:solidFill>
-                    <a:lnT w="6350" cap="flat" cmpd="sng" algn="ctr">
-                      <a:solidFill>
-                        <a:srgbClr val="D9D9D9"/>
-                      </a:solidFill>
-                    </a:lnT>
-                    <a:lnB w="6350" cap="flat" cmpd="sng" algn="ctr">
-                      <a:solidFill>
-                        <a:srgbClr val="D9D9D9"/>
-                      </a:solidFill>
-                    </a:lnB>
-                    <a:lnL w="6350" cap="flat" cmpd="sng" algn="ctr">
-                      <a:solidFill>
-                        <a:srgbClr val="D9D9D9"/>
-                      </a:solidFill>
-                    </a:lnL>
-                    <a:lnR w="6350" cap="flat" cmpd="sng" algn="ctr">
-                      <a:solidFill>
-                        <a:srgbClr val="D9D9D9"/>
-                      </a:solidFill>
-                    </a:lnR>
-                  </a:tcPr>
-                </a:tc>
-                <a:tc>
-                  <a:txBody>
-                    <a:bodyPr wrap="square"/>
-                    <a:lstStyle/>
-                    <a:p>
-                      <a:pPr algn="ctr"/>
-                      <a:r>
-                        <a:rPr sz="1200" b="0">
-                          <a:solidFill>
-                            <a:srgbClr val="404040"/>
-                          </a:solidFill>
-                          <a:latin typeface="맑은 고딕"/>
-                          <a:ea typeface="맑은 고딕"/>
-                          <a:cs typeface="맑은 고딕"/>
-                        </a:rPr>
-                        <a:t>10.9%</a:t>
-                      </a:r>
-                    </a:p>
-                  </a:txBody>
-                  <a:tcPr marL="91440" marR="91440" marT="36576" marB="36576" anchor="ctr">
-                    <a:solidFill>
-                      <a:srgbClr val="FFFFFF"/>
-                    </a:solidFill>
-                    <a:lnT w="6350" cap="flat" cmpd="sng" algn="ctr">
-                      <a:solidFill>
-                        <a:srgbClr val="D9D9D9"/>
-                      </a:solidFill>
-                    </a:lnT>
-                    <a:lnB w="6350" cap="flat" cmpd="sng" algn="ctr">
-                      <a:solidFill>
-                        <a:srgbClr val="D9D9D9"/>
-                      </a:solidFill>
-                    </a:lnB>
-                    <a:lnL w="6350" cap="flat" cmpd="sng" algn="ctr">
-                      <a:solidFill>
-                        <a:srgbClr val="D9D9D9"/>
-                      </a:solidFill>
-                    </a:lnL>
-                    <a:lnR w="6350" cap="flat" cmpd="sng" algn="ctr">
-                      <a:solidFill>
-                        <a:srgbClr val="D9D9D9"/>
-                      </a:solidFill>
-                    </a:lnR>
-                  </a:tcPr>
-                </a:tc>
-                <a:tc>
-                  <a:txBody>
-                    <a:bodyPr wrap="square"/>
-                    <a:lstStyle/>
-                    <a:p>
-                      <a:pPr algn="ctr"/>
-                      <a:r>
-                        <a:rPr sz="1200" b="0">
-                          <a:solidFill>
-                            <a:srgbClr val="404040"/>
-                          </a:solidFill>
-                          <a:latin typeface="맑은 고딕"/>
-                          <a:ea typeface="맑은 고딕"/>
-                          <a:cs typeface="맑은 고딕"/>
-                        </a:rPr>
-                        <a:t>13.1%</a:t>
-                      </a:r>
-                    </a:p>
-                  </a:txBody>
-                  <a:tcPr marL="91440" marR="91440" marT="36576" marB="36576" anchor="ctr">
-                    <a:solidFill>
-                      <a:srgbClr val="FFFFFF"/>
-                    </a:solidFill>
-                    <a:lnT w="6350" cap="flat" cmpd="sng" algn="ctr">
-                      <a:solidFill>
-                        <a:srgbClr val="D9D9D9"/>
-                      </a:solidFill>
-                    </a:lnT>
-                    <a:lnB w="6350" cap="flat" cmpd="sng" algn="ctr">
-                      <a:solidFill>
-                        <a:srgbClr val="D9D9D9"/>
-                      </a:solidFill>
-                    </a:lnB>
-                    <a:lnL w="6350" cap="flat" cmpd="sng" algn="ctr">
-                      <a:solidFill>
-                        <a:srgbClr val="D9D9D9"/>
-                      </a:solidFill>
-                    </a:lnL>
-                    <a:lnR w="6350" cap="flat" cmpd="sng" algn="ctr">
-                      <a:solidFill>
-                        <a:srgbClr val="D9D9D9"/>
-                      </a:solidFill>
-                    </a:lnR>
-                  </a:tcPr>
-                </a:tc>
-              </a:tr>
-              <a:tr h="411480">
-                <a:tc>
-                  <a:txBody>
-                    <a:bodyPr wrap="square"/>
-                    <a:lstStyle/>
-                    <a:p>
-                      <a:pPr algn="l"/>
-                      <a:r>
-                        <a:rPr sz="1200" b="0">
-                          <a:solidFill>
-                            <a:srgbClr val="404040"/>
-                          </a:solidFill>
-                          <a:latin typeface="맑은 고딕"/>
-                          <a:ea typeface="맑은 고딕"/>
-                          <a:cs typeface="맑은 고딕"/>
-                        </a:rPr>
-                        <a:t>부채비율</a:t>
-                      </a:r>
-                    </a:p>
-                  </a:txBody>
-                  <a:tcPr marL="91440" marR="91440" marT="36576" marB="36576" anchor="ctr">
-                    <a:solidFill>
-                      <a:srgbClr val="FFFFFF"/>
-                    </a:solidFill>
-                    <a:lnT w="6350" cap="flat" cmpd="sng" algn="ctr">
-                      <a:solidFill>
-                        <a:srgbClr val="D9D9D9"/>
-                      </a:solidFill>
-                    </a:lnT>
-                    <a:lnB w="6350" cap="flat" cmpd="sng" algn="ctr">
-                      <a:solidFill>
-                        <a:srgbClr val="D9D9D9"/>
-                      </a:solidFill>
-                    </a:lnB>
-                    <a:lnL w="6350" cap="flat" cmpd="sng" algn="ctr">
-                      <a:solidFill>
-                        <a:srgbClr val="D9D9D9"/>
-                      </a:solidFill>
-                    </a:lnL>
-                    <a:lnR w="6350" cap="flat" cmpd="sng" algn="ctr">
-                      <a:solidFill>
-                        <a:srgbClr val="D9D9D9"/>
-                      </a:solidFill>
-                    </a:lnR>
-                  </a:tcPr>
-                </a:tc>
-                <a:tc>
-                  <a:txBody>
-                    <a:bodyPr wrap="square"/>
-                    <a:lstStyle/>
-                    <a:p>
-                      <a:pPr algn="ctr"/>
-                      <a:r>
-                        <a:rPr sz="1200" b="0">
-                          <a:solidFill>
-                            <a:srgbClr val="404040"/>
-                          </a:solidFill>
-                          <a:latin typeface="맑은 고딕"/>
-                          <a:ea typeface="맑은 고딕"/>
-                          <a:cs typeface="맑은 고딕"/>
-                        </a:rPr>
-                        <a:t>25.4%</a:t>
-                      </a:r>
-                    </a:p>
-                  </a:txBody>
-                  <a:tcPr marL="91440" marR="91440" marT="36576" marB="36576" anchor="ctr">
-                    <a:solidFill>
-                      <a:srgbClr val="FFFFFF"/>
-                    </a:solidFill>
-                    <a:lnT w="6350" cap="flat" cmpd="sng" algn="ctr">
-                      <a:solidFill>
-                        <a:srgbClr val="D9D9D9"/>
-                      </a:solidFill>
-                    </a:lnT>
-                    <a:lnB w="6350" cap="flat" cmpd="sng" algn="ctr">
-                      <a:solidFill>
-                        <a:srgbClr val="D9D9D9"/>
-                      </a:solidFill>
-                    </a:lnB>
-                    <a:lnL w="6350" cap="flat" cmpd="sng" algn="ctr">
-                      <a:solidFill>
-                        <a:srgbClr val="D9D9D9"/>
-                      </a:solidFill>
-                    </a:lnL>
-                    <a:lnR w="6350" cap="flat" cmpd="sng" algn="ctr">
-                      <a:solidFill>
-                        <a:srgbClr val="D9D9D9"/>
-                      </a:solidFill>
-                    </a:lnR>
-                  </a:tcPr>
-                </a:tc>
-                <a:tc>
-                  <a:txBody>
-                    <a:bodyPr wrap="square"/>
-                    <a:lstStyle/>
-                    <a:p>
-                      <a:pPr algn="ctr"/>
-                      <a:r>
-                        <a:rPr sz="1200" b="0">
-                          <a:solidFill>
-                            <a:srgbClr val="404040"/>
-                          </a:solidFill>
-                          <a:latin typeface="맑은 고딕"/>
-                          <a:ea typeface="맑은 고딕"/>
-                          <a:cs typeface="맑은 고딕"/>
-                        </a:rPr>
-                        <a:t>27.9%</a:t>
-                      </a:r>
-                    </a:p>
-                  </a:txBody>
-                  <a:tcPr marL="91440" marR="91440" marT="36576" marB="36576" anchor="ctr">
-                    <a:solidFill>
-                      <a:srgbClr val="FFFFFF"/>
-                    </a:solidFill>
-                    <a:lnT w="6350" cap="flat" cmpd="sng" algn="ctr">
-                      <a:solidFill>
-                        <a:srgbClr val="D9D9D9"/>
-                      </a:solidFill>
-                    </a:lnT>
-                    <a:lnB w="6350" cap="flat" cmpd="sng" algn="ctr">
-                      <a:solidFill>
-                        <a:srgbClr val="D9D9D9"/>
-                      </a:solidFill>
-                    </a:lnB>
-                    <a:lnL w="6350" cap="flat" cmpd="sng" algn="ctr">
-                      <a:solidFill>
-                        <a:srgbClr val="D9D9D9"/>
-                      </a:solidFill>
-                    </a:lnL>
-                    <a:lnR w="6350" cap="flat" cmpd="sng" algn="ctr">
-                      <a:solidFill>
-                        <a:srgbClr val="D9D9D9"/>
-                      </a:solidFill>
-                    </a:lnR>
-                  </a:tcPr>
-                </a:tc>
-                <a:tc>
-                  <a:txBody>
-                    <a:bodyPr wrap="square"/>
-                    <a:lstStyle/>
-                    <a:p>
-                      <a:pPr algn="ctr"/>
-                      <a:r>
-                        <a:rPr sz="1200" b="0">
-                          <a:solidFill>
-                            <a:srgbClr val="404040"/>
-                          </a:solidFill>
-                          <a:latin typeface="맑은 고딕"/>
-                          <a:ea typeface="맑은 고딕"/>
-                          <a:cs typeface="맑은 고딕"/>
-                        </a:rPr>
-                        <a:t>29.9%</a:t>
-                      </a:r>
-                    </a:p>
-                  </a:txBody>
-                  <a:tcPr marL="91440" marR="91440" marT="36576" marB="36576" anchor="ctr">
-                    <a:solidFill>
-                      <a:srgbClr val="FFFFFF"/>
-                    </a:solidFill>
-                    <a:lnT w="6350" cap="flat" cmpd="sng" algn="ctr">
-                      <a:solidFill>
-                        <a:srgbClr val="D9D9D9"/>
-                      </a:solidFill>
-                    </a:lnT>
-                    <a:lnB w="6350" cap="flat" cmpd="sng" algn="ctr">
-                      <a:solidFill>
-                        <a:srgbClr val="D9D9D9"/>
-                      </a:solidFill>
-                    </a:lnB>
-                    <a:lnL w="6350" cap="flat" cmpd="sng" algn="ctr">
-                      <a:solidFill>
-                        <a:srgbClr val="D9D9D9"/>
-                      </a:solidFill>
-                    </a:lnL>
-                    <a:lnR w="6350" cap="flat" cmpd="sng" algn="ctr">
-                      <a:solidFill>
-                        <a:srgbClr val="D9D9D9"/>
-                      </a:solidFill>
-                    </a:lnR>
-                  </a:tcPr>
-                </a:tc>
-              </a:tr>
-              <a:tr h="411480">
-                <a:tc>
-                  <a:txBody>
-                    <a:bodyPr wrap="square"/>
-                    <a:lstStyle/>
-                    <a:p>
-                      <a:pPr algn="l"/>
-                      <a:r>
-                        <a:rPr sz="1200" b="0">
-                          <a:solidFill>
-                            <a:srgbClr val="404040"/>
-                          </a:solidFill>
-                          <a:latin typeface="맑은 고딕"/>
-                          <a:ea typeface="맑은 고딕"/>
-                          <a:cs typeface="맑은 고딕"/>
-                        </a:rPr>
-                        <a:t>이익잉여금(조원)</a:t>
-                      </a:r>
-                    </a:p>
-                  </a:txBody>
-                  <a:tcPr marL="91440" marR="91440" marT="36576" marB="36576" anchor="ctr">
-                    <a:solidFill>
-                      <a:srgbClr val="FFFFFF"/>
-                    </a:solidFill>
-                    <a:lnT w="6350" cap="flat" cmpd="sng" algn="ctr">
-                      <a:solidFill>
-                        <a:srgbClr val="D9D9D9"/>
-                      </a:solidFill>
-                    </a:lnT>
-                    <a:lnB w="6350" cap="flat" cmpd="sng" algn="ctr">
-                      <a:solidFill>
-                        <a:srgbClr val="D9D9D9"/>
-                      </a:solidFill>
-                    </a:lnB>
-                    <a:lnL w="6350" cap="flat" cmpd="sng" algn="ctr">
-                      <a:solidFill>
-                        <a:srgbClr val="D9D9D9"/>
-                      </a:solidFill>
-                    </a:lnL>
-                    <a:lnR w="6350" cap="flat" cmpd="sng" algn="ctr">
-                      <a:solidFill>
-                        <a:srgbClr val="D9D9D9"/>
-                      </a:solidFill>
-                    </a:lnR>
-                  </a:tcPr>
-                </a:tc>
-                <a:tc>
-                  <a:txBody>
-                    <a:bodyPr wrap="square"/>
-                    <a:lstStyle/>
-                    <a:p>
-                      <a:pPr algn="ctr"/>
-                      <a:r>
-                        <a:rPr sz="1200" b="0">
-                          <a:solidFill>
-                            <a:srgbClr val="404040"/>
-                          </a:solidFill>
-                          <a:latin typeface="맑은 고딕"/>
-                          <a:ea typeface="맑은 고딕"/>
-                          <a:cs typeface="맑은 고딕"/>
-                        </a:rPr>
-                        <a:t>346.7</a:t>
-                      </a:r>
-                    </a:p>
-                  </a:txBody>
-                  <a:tcPr marL="91440" marR="91440" marT="36576" marB="36576" anchor="ctr">
-                    <a:solidFill>
-                      <a:srgbClr val="FFFFFF"/>
-                    </a:solidFill>
-                    <a:lnT w="6350" cap="flat" cmpd="sng" algn="ctr">
-                      <a:solidFill>
-                        <a:srgbClr val="D9D9D9"/>
-                      </a:solidFill>
-                    </a:lnT>
-                    <a:lnB w="6350" cap="flat" cmpd="sng" algn="ctr">
-                      <a:solidFill>
-                        <a:srgbClr val="D9D9D9"/>
-                      </a:solidFill>
-                    </a:lnB>
-                    <a:lnL w="6350" cap="flat" cmpd="sng" algn="ctr">
-                      <a:solidFill>
-                        <a:srgbClr val="D9D9D9"/>
-                      </a:solidFill>
-                    </a:lnL>
-                    <a:lnR w="6350" cap="flat" cmpd="sng" algn="ctr">
-                      <a:solidFill>
-                        <a:srgbClr val="D9D9D9"/>
-                      </a:solidFill>
-                    </a:lnR>
-                  </a:tcPr>
-                </a:tc>
-                <a:tc>
-                  <a:txBody>
-                    <a:bodyPr wrap="square"/>
-                    <a:lstStyle/>
-                    <a:p>
-                      <a:pPr algn="ctr"/>
-                      <a:r>
-                        <a:rPr sz="1200" b="0">
-                          <a:solidFill>
-                            <a:srgbClr val="404040"/>
-                          </a:solidFill>
-                          <a:latin typeface="맑은 고딕"/>
-                          <a:ea typeface="맑은 고딕"/>
-                          <a:cs typeface="맑은 고딕"/>
-                        </a:rPr>
-                        <a:t>370.5</a:t>
-                      </a:r>
-                    </a:p>
-                  </a:txBody>
-                  <a:tcPr marL="91440" marR="91440" marT="36576" marB="36576" anchor="ctr">
-                    <a:solidFill>
-                      <a:srgbClr val="FFFFFF"/>
-                    </a:solidFill>
-                    <a:lnT w="6350" cap="flat" cmpd="sng" algn="ctr">
-                      <a:solidFill>
-                        <a:srgbClr val="D9D9D9"/>
-                      </a:solidFill>
-                    </a:lnT>
-                    <a:lnB w="6350" cap="flat" cmpd="sng" algn="ctr">
-                      <a:solidFill>
-                        <a:srgbClr val="D9D9D9"/>
-                      </a:solidFill>
-                    </a:lnB>
-                    <a:lnL w="6350" cap="flat" cmpd="sng" algn="ctr">
-                      <a:solidFill>
-                        <a:srgbClr val="D9D9D9"/>
-                      </a:solidFill>
-                    </a:lnL>
-                    <a:lnR w="6350" cap="flat" cmpd="sng" algn="ctr">
-                      <a:solidFill>
-                        <a:srgbClr val="D9D9D9"/>
-                      </a:solidFill>
-                    </a:lnR>
-                  </a:tcPr>
-                </a:tc>
-                <a:tc>
-                  <a:txBody>
-                    <a:bodyPr wrap="square"/>
-                    <a:lstStyle/>
-                    <a:p>
-                      <a:pPr algn="ctr"/>
-                      <a:r>
-                        <a:rPr sz="1200" b="0">
-                          <a:solidFill>
-                            <a:srgbClr val="404040"/>
-                          </a:solidFill>
-                          <a:latin typeface="맑은 고딕"/>
-                          <a:ea typeface="맑은 고딕"/>
-                          <a:cs typeface="맑은 고딕"/>
-                        </a:rPr>
-                        <a:t>402.1</a:t>
-                      </a:r>
-                    </a:p>
-                  </a:txBody>
-                  <a:tcPr marL="91440" marR="91440" marT="36576" marB="36576" anchor="ctr">
-                    <a:solidFill>
-                      <a:srgbClr val="FFFFFF"/>
-                    </a:solidFill>
-                    <a:lnT w="6350" cap="flat" cmpd="sng" algn="ctr">
-                      <a:solidFill>
-                        <a:srgbClr val="D9D9D9"/>
-                      </a:solidFill>
-                    </a:lnT>
-                    <a:lnB w="6350" cap="flat" cmpd="sng" algn="ctr">
-                      <a:solidFill>
-                        <a:srgbClr val="D9D9D9"/>
-                      </a:solidFill>
-                    </a:lnB>
-                    <a:lnL w="6350" cap="flat" cmpd="sng" algn="ctr">
-                      <a:solidFill>
-                        <a:srgbClr val="D9D9D9"/>
-                      </a:solidFill>
-                    </a:lnL>
-                    <a:lnR w="6350" cap="flat" cmpd="sng" algn="ctr">
-                      <a:solidFill>
-                        <a:srgbClr val="D9D9D9"/>
-                      </a:solidFill>
-                    </a:lnR>
-                  </a:tcPr>
-                </a:tc>
-              </a:tr>
-            </a:tbl>
-          </a:graphicData>
-        </a:graphic>
-      </p:graphicFrame>
-      <p:sp>
-        <p:nvSpPr>
-          <p:cNvPr id="6" name="TextBox 5"/>
+      <p:sp>
+        <p:nvSpPr>
+          <p:cNvPr id="5" name="TextBox 4"/>
           <p:cNvSpPr txBox="1"/>
           <p:nvPr/>
         </p:nvSpPr>
         <p:spPr>
           <a:xfrm>
-            <a:off x="548640" y="4526280"/>
-            <a:ext cx="11094415" cy="1783080"/>
+            <a:off x="548640" y="1371600"/>
+            <a:ext cx="11094415" cy="4937760"/>
           </a:xfrm>
           <a:prstGeom prst="rect">
             <a:avLst/>
@@ -4953,86 +3695,14 @@
                 <a:ea typeface="맑은 고딕"/>
                 <a:cs typeface="맑은 고딕"/>
               </a:rPr>
-              <a:t>(출처: DART 전자공시 사업보고서 / 기준일 2026-06-16, 연결재무제표 기준)</a:t>
-            </a:r>
-          </a:p>
-          <a:p>
-            <a:pPr>
-              <a:spcAft>
-                <a:spcPts val="800"/>
-              </a:spcAft>
-            </a:pPr>
-            <a:r>
-              <a:rPr sz="1600" b="0">
-                <a:solidFill>
-                  <a:srgbClr val="404040"/>
-                </a:solidFill>
-                <a:latin typeface="맑은 고딕"/>
-                <a:ea typeface="맑은 고딕"/>
-                <a:cs typeface="맑은 고딕"/>
-              </a:rPr>
-              <a:t>• 매출액은 2년 연속 증가했고(258.9→300.9→333.6조원), 영업이익은 2023년 저점(6.6조원) 이후 2024년 32.7조원, 2025년 43.6조원으로 가파르게 회복했습니다. (출처: DART 사업보고서 / 기준일 2026-06-16)</a:t>
-            </a:r>
-          </a:p>
-          <a:p>
-            <a:pPr>
-              <a:spcAft>
-                <a:spcPts val="800"/>
-              </a:spcAft>
-            </a:pPr>
-            <a:r>
-              <a:rPr sz="1600" b="0">
-                <a:solidFill>
-                  <a:srgbClr val="404040"/>
-                </a:solidFill>
-                <a:latin typeface="맑은 고딕"/>
-                <a:ea typeface="맑은 고딕"/>
-                <a:cs typeface="맑은 고딕"/>
-              </a:rPr>
-              <a:t>• 영업이익률이 2.5%→10.9%→13.1%로 추세적으로 개선되어 수익성 회복이 확인됩니다. (출처: DART 사업보고서 / 기준일 2026-06-16)</a:t>
-            </a:r>
-          </a:p>
-          <a:p>
-            <a:pPr>
-              <a:spcAft>
-                <a:spcPts val="800"/>
-              </a:spcAft>
-            </a:pPr>
-            <a:r>
-              <a:rPr sz="1600" b="0">
-                <a:solidFill>
-                  <a:srgbClr val="404040"/>
-                </a:solidFill>
-                <a:latin typeface="맑은 고딕"/>
-                <a:ea typeface="맑은 고딕"/>
-                <a:cs typeface="맑은 고딕"/>
-              </a:rPr>
-              <a:t>• 부채비율은 30% 내외로 절대 수준이 낮고, 이익잉여금은 매년 누적 증가(346.7→402.1조원)해 재무 안정성이 양호합니다. (출처: DART 사업보고서 / 기준일 2026-06-16)</a:t>
-            </a:r>
-          </a:p>
-          <a:p>
-            <a:pPr>
-              <a:spcAft>
-                <a:spcPts val="800"/>
-              </a:spcAft>
-            </a:pPr>
-            <a:r>
-              <a:rPr sz="1600" b="0">
-                <a:solidFill>
-                  <a:srgbClr val="404040"/>
-                </a:solidFill>
-                <a:latin typeface="맑은 고딕"/>
-                <a:ea typeface="맑은 고딕"/>
-                <a:cs typeface="맑은 고딕"/>
-              </a:rPr>
-              <a:t>• 1Q2026 분기 실적은 매출 133.9조원·영업이익 57.2조원으로, DART 수치가 삼성 공식 뉴스룸·외신을 통해 실제 사상 최대 분기 실적으로 교차 확인되었습니다(HBM/AI 메모리 호황 기인). (출처: DART 분기보고서·삼성 뉴스룸 / 기준일 2026-06-16)</a:t>
-            </a:r>
-          </a:p>
-        </p:txBody>
-      </p:sp>
-      <p:sp>
-        <p:nvSpPr>
-          <p:cNvPr id="7" name="TextBox 6"/>
+              <a:t>• DART_KEY 미설정 또는 조회 실패로 재무 수치는 **확인 불가**입니다. `.env`에 `DART_KEY`를 설정하면 자동 수집됩니다. (기준일 2026-06-16)</a:t>
+            </a:r>
+          </a:p>
+        </p:txBody>
+      </p:sp>
+      <p:sp>
+        <p:nvSpPr>
+          <p:cNvPr id="6" name="TextBox 5"/>
           <p:cNvSpPr txBox="1"/>
           <p:nvPr/>
         </p:nvSpPr>
@@ -5222,8 +3892,8 @@
         </p:blipFill>
         <p:spPr>
           <a:xfrm>
-            <a:off x="2216179" y="1371600"/>
-            <a:ext cx="7759337" cy="4937760"/>
+            <a:off x="609447" y="1371600"/>
+            <a:ext cx="10972800" cy="4937760"/>
           </a:xfrm>
           <a:prstGeom prst="rect">
             <a:avLst/>
@@ -5266,7 +3936,7 @@
                 <a:ea typeface="맑은 고딕"/>
                 <a:cs typeface="맑은 고딕"/>
               </a:rPr>
-              <a:t>• 현재가 343,000원, MA20 312,925원 / MA60 249,742원으로 정배열이며 두 이동평균 모두 상승 방향입니다. (출처: FinanceDataReader / 기준일 2026-06-16, 일별·지연)</a:t>
+              <a:t>• 최근 1년 종가 기준 고점 360,500원, 저점 57,200원입니다. (출처: FinanceDataReader / 기준일 2026-06-16)</a:t>
             </a:r>
           </a:p>
           <a:p>
@@ -5284,7 +3954,7 @@
                 <a:ea typeface="맑은 고딕"/>
                 <a:cs typeface="맑은 고딕"/>
               </a:rPr>
-              <a:t>• 52주 고가 360,500원(2026-06-02)·저가 53,900원(2025-05-27), 현재가는 52주 밴드 내 약 94.3% 고가권에 위치합니다. (출처: FinanceDataReader / 기준일 2026-06-16)</a:t>
+              <a:t>• 최근 약 1개월 등락률은 +15.9%입니다. (출처: FinanceDataReader / 기준일 2026-06-16)</a:t>
             </a:r>
           </a:p>
           <a:p>
@@ -5302,7 +3972,7 @@
                 <a:ea typeface="맑은 고딕"/>
                 <a:cs typeface="맑은 고딕"/>
               </a:rPr>
-              <a:t>• 6개월 등락률은 +218.77%로 강한 상승 국면이나, 최근 5일 거래량이 20일 평균의 80.5% 수준으로 가격 상승 대비 거래 동반은 다소 약화되었습니다. (출처: FinanceDataReader / 기준일 2026-06-16)</a:t>
+              <a:t>• 최근 20거래일 평균 거래량은 약 31,716,915주입니다. (출처: FinanceDataReader / 기준일 2026-06-16)</a:t>
             </a:r>
           </a:p>
         </p:txBody>
@@ -5519,79 +4189,7 @@
                 <a:ea typeface="맑은 고딕"/>
                 <a:cs typeface="맑은 고딕"/>
               </a:rPr>
-              <a:t>• **시장 심리: 긍정** — 사상 최대 실적, HBM4 매출 확대 전망, 파운드리 수주, 적극적 주주환원이 동시 작용하며 주가가 사상 최고치를 경신한 점이 근거입니다. (출처: 종합 / 기준일 2026-06-16)</a:t>
-            </a:r>
-          </a:p>
-          <a:p>
-            <a:pPr>
-              <a:spcAft>
-                <a:spcPts val="800"/>
-              </a:spcAft>
-            </a:pPr>
-            <a:r>
-              <a:rPr sz="1600" b="0">
-                <a:solidFill>
-                  <a:srgbClr val="404040"/>
-                </a:solidFill>
-                <a:latin typeface="맑은 고딕"/>
-                <a:ea typeface="맑은 고딕"/>
-                <a:cs typeface="맑은 고딕"/>
-              </a:rPr>
-              <a:t>• 1Q2026 사상 최대 실적: 매출 133.9조원(+69% YoY)·영업이익 57.2조원으로 FY2025 연간 영업이익을 한 분기에 상회했습니다. (출처: Samsung Global Newsroom·DCD / 2026 1분기)</a:t>
-            </a:r>
-          </a:p>
-          <a:p>
-            <a:pPr>
-              <a:spcAft>
-                <a:spcPts val="800"/>
-              </a:spcAft>
-            </a:pPr>
-            <a:r>
-              <a:rPr sz="1600" b="0">
-                <a:solidFill>
-                  <a:srgbClr val="404040"/>
-                </a:solidFill>
-                <a:latin typeface="맑은 고딕"/>
-                <a:ea typeface="맑은 고딕"/>
-                <a:cs typeface="맑은 고딕"/>
-              </a:rPr>
-              <a:t>• HBM 본격 확대: HBM4 출하 본격화 및 2026년 HBM 매출 3배 이상 전망입니다(증권가 추정 가정 포함). (출처: thebell·뉴데일리 / 2026-01~03)</a:t>
-            </a:r>
-          </a:p>
-          <a:p>
-            <a:pPr>
-              <a:spcAft>
-                <a:spcPts val="800"/>
-              </a:spcAft>
-            </a:pPr>
-            <a:r>
-              <a:rPr sz="1600" b="0">
-                <a:solidFill>
-                  <a:srgbClr val="404040"/>
-                </a:solidFill>
-                <a:latin typeface="맑은 고딕"/>
-                <a:ea typeface="맑은 고딕"/>
-                <a:cs typeface="맑은 고딕"/>
-              </a:rPr>
-              <a:t>• 테슬라 파운드리 수주(약 22.8조원)와 2026년 파운드리 흑자전환·가동률 개선 기대입니다. (출처: 디일렉·테크월드 / 2025-07 계약, 2026 양산)</a:t>
-            </a:r>
-          </a:p>
-          <a:p>
-            <a:pPr>
-              <a:spcAft>
-                <a:spcPts val="800"/>
-              </a:spcAft>
-            </a:pPr>
-            <a:r>
-              <a:rPr sz="1600" b="0">
-                <a:solidFill>
-                  <a:srgbClr val="404040"/>
-                </a:solidFill>
-                <a:latin typeface="맑은 고딕"/>
-                <a:ea typeface="맑은 고딕"/>
-                <a:cs typeface="맑은 고딕"/>
-              </a:rPr>
-              <a:t>• 주주환원: 결산배당 증액, 자사주 약 16조원 소각 계획, FCF 50% 환원 정책 유지입니다(일부 배당 수치는 매체별 차이로 미확인). (출처: 삼성전자 IR / 2026-03)</a:t>
+              <a:t>• 본 자동 파이프라인은 뉴스·심리를 수집하지 않습니다. 뉴스·심리 분석은 Claude Code의 `news-sentiment-analyst`로 별도 수행해 주십시오. (기준일 2026-06-16)</a:t>
             </a:r>
           </a:p>
         </p:txBody>
@@ -5808,61 +4406,7 @@
                 <a:ea typeface="맑은 고딕"/>
                 <a:cs typeface="맑은 고딕"/>
               </a:rPr>
-              <a:t>• **① 메모리 사이클·HBM 경쟁 실적 변동성**: 1Q2026 초호황 이익은 HBM/AI 메모리 사이클에 크게 기인해 ASP·수요 변동 시 이익 레버리지가 반대로도 크게 작동할 수 있고, HBM 시장 선두는 SK하이닉스입니다. (출처: DART·뉴스 종합 / 기준일 2026-06-16)</a:t>
-            </a:r>
-          </a:p>
-          <a:p>
-            <a:pPr>
-              <a:spcAft>
-                <a:spcPts val="800"/>
-              </a:spcAft>
-            </a:pPr>
-            <a:r>
-              <a:rPr sz="1600" b="0">
-                <a:solidFill>
-                  <a:srgbClr val="404040"/>
-                </a:solidFill>
-                <a:latin typeface="맑은 고딕"/>
-                <a:ea typeface="맑은 고딕"/>
-                <a:cs typeface="맑은 고딕"/>
-              </a:rPr>
-              <a:t>• **② 고가권·모멘텀 약화 가격 변동성**: 52주 밴드 94.3% 고가권, 6개월 +218.77% 급등 이후 구간에서 거래량이 20일 평균의 80.5%로 약화돼 차익실현·변동성 확대에 민감할 수 있습니다. (출처: FinanceDataReader / 기준일 2026-06-16)</a:t>
-            </a:r>
-          </a:p>
-          <a:p>
-            <a:pPr>
-              <a:spcAft>
-                <a:spcPts val="800"/>
-              </a:spcAft>
-            </a:pPr>
-            <a:r>
-              <a:rPr sz="1600" b="0">
-                <a:solidFill>
-                  <a:srgbClr val="404040"/>
-                </a:solidFill>
-                <a:latin typeface="맑은 고딕"/>
-                <a:ea typeface="맑은 고딕"/>
-                <a:cs typeface="맑은 고딕"/>
-              </a:rPr>
-              <a:t>• **③ 외국인·패시브 수급 쏠림 및 환원 가정 의존**: 대형주 특성상 지수 연동·외국인 수급 변화에 변동성이 증폭될 수 있고, 주주환원·파운드리 수주 가정이 흔들리면 밸류에이션 지지력이 약화될 수 있습니다. 일부 환원·시총 수치는 추가 확인이 필요합니다. (출처: pykrx·뉴스 종합 / 기준일 2026-06-16)</a:t>
-            </a:r>
-          </a:p>
-          <a:p>
-            <a:pPr>
-              <a:spcAft>
-                <a:spcPts val="800"/>
-              </a:spcAft>
-            </a:pPr>
-            <a:r>
-              <a:rPr sz="1600" b="0">
-                <a:solidFill>
-                  <a:srgbClr val="404040"/>
-                </a:solidFill>
-                <a:latin typeface="맑은 고딕"/>
-                <a:ea typeface="맑은 고딕"/>
-                <a:cs typeface="맑은 고딕"/>
-              </a:rPr>
-              <a:t>• 모니터링 포인트: 2026-07-23 실적발표의 HBM 비중·메모리 ASP·파운드리 흑자전환, 일별 거래대금 회복 여부, MA20(312,925)·MA60(249,742) 이탈 및 52주 고가(360,500) 재돌파 여부입니다. (출처: 종합 / 기준일 2026-06-16)</a:t>
+              <a:t>• 정량 리스크(유동성·변동성) 점검은 Claude Code의 `risk-manager-analyst`로 보강하는 것을 권장합니다. (기준일 2026-06-16)</a:t>
             </a:r>
           </a:p>
         </p:txBody>
@@ -6075,7 +4619,7 @@
                 <a:ea typeface="맑은 고딕"/>
                 <a:cs typeface="맑은 고딕"/>
               </a:rPr>
-              <a:t>3개년 매출·이익 동반 증가와 영업이익률 2.5%→13.1% 회복, 30% 내외의 낮은 부채비율이 확인되는 펀더멘털 개선 국면이나, 실적이 메모리·HBM 사이클에 크게 의존하고 주가가 고가권·거래 약화 구간에 있어 변동성 점검이 함께 필요한 시점입니다. (출처: DART·FinanceDataReader·뉴스 종합 / 기준일 2026-06-16)</a:t>
+              <a:t>삼성전자의 최근 1년 가격은 고점 360,500원·저점 57,200원 구간에서 형성되었으며, 본 자료는 출처 있는 수치만으로 구성한 학습용 분석입니다.</a:t>
             </a:r>
           </a:p>
         </p:txBody>
